--- a/deliverables/camera-intrinsics-progress-defense/Camera_Intrinsics_Progress_Defense.pptx
+++ b/deliverables/camera-intrinsics-progress-defense/Camera_Intrinsics_Progress_Defense.pptx
@@ -9020,6 +9020,47 @@
           </a:p>
         </p:txBody>
       </p:sp>
+      <p:sp>
+        <p:nvSpPr>
+          <p:cNvPr id="9001" name="Intrinsics ambiguity video callout"/>
+          <p:cNvSpPr/>
+          <p:nvPr/>
+        </p:nvSpPr>
+        <p:spPr>
+          <ns0:xfrm xmlns:ns0="http://schemas.openxmlformats.org/drawingml/2006/main">
+            <ns0:off x="600000" y="5000000"/>
+            <ns0:ext cx="10800000" cy="900000"/>
+          </ns0:xfrm>
+          <ns1:prstGeom xmlns:ns1="http://schemas.openxmlformats.org/drawingml/2006/main" prst="roundRect"/>
+          <ns2:solidFill xmlns:ns2="http://schemas.openxmlformats.org/drawingml/2006/main">
+            <ns2:srgbClr val="EAF1FB"/>
+          </ns2:solidFill>
+          <ns3:ln xmlns:ns3="http://schemas.openxmlformats.org/drawingml/2006/main" w="12700">
+            <ns3:solidFill>
+              <ns3:srgbClr val="2656D8"/>
+            </ns3:solidFill>
+          </ns3:ln>
+        </p:spPr>
+        <p:txBody>
+          <ns4:bodyPr xmlns:ns4="http://schemas.openxmlformats.org/drawingml/2006/main" lIns="180000" rIns="180000" tIns="90000" bIns="90000" anchor="ctr"/>
+          <ns5:lstStyle xmlns:ns5="http://schemas.openxmlformats.org/drawingml/2006/main"/>
+          <ns6:p xmlns:ns6="http://schemas.openxmlformats.org/drawingml/2006/main">
+            <ns6:pPr algn="l">
+              <ns6:defRPr sz="1550" b="1"/>
+            </ns6:pPr>
+            <ns6:r>
+              <ns6:rPr sz="1550" b="1">
+                <ns6:solidFill>
+                  <ns6:srgbClr val="101C36"/>
+                </ns6:solidFill>
+                <ns6:hlinkClick xmlns:ns7="http://schemas.openxmlformats.org/officeDocument/2006/relationships" ns7:id="rId1"/>
+              </ns6:rPr>
+              <ns6:t>Video demo: camera intrinsics K are required to resolve the little–big ambiguity  ›  open little-big-ambiguty.mp4</ns6:t>
+            </ns6:r>
+            <ns6:endParaRPr lang="en-US" sz="1550"/>
+          </ns6:p>
+        </p:txBody>
+      </p:sp>
     </p:spTree>
     <p:extLst>
       <p:ext uri="{BB962C8B-B14F-4D97-AF65-F5344CB8AC3E}">
